--- a/neerlandais1/powerpoints/Module_7_Landen_en_talen.pptx
+++ b/neerlandais1/powerpoints/Module_7_Landen_en_talen.pptx
@@ -132,19 +132,19 @@
   <p:extLst>
     <p:ext uri="{521415D9-36F7-43E2-AB2F-B90AF26B5E84}">
       <p14:sectionLst xmlns:p14="http://schemas.microsoft.com/office/powerpoint/2010/main">
-        <p14:section name="Ouverture" id="{6580015a-986d-f70d-0713-81ba6bb1a220}">
+        <p14:section name="Ouverture" id="{fd0694a7-01c6-c918-9d8e-5f7bd01a6401}">
           <p14:sldIdLst>
             <p14:sldId id="256"/>
           </p14:sldIdLst>
         </p14:section>
-        <p14:section name="Découvrir" id="{5adc7cc2-3118-4531-8ac2-89c45b273c31}">
+        <p14:section name="Découvrir" id="{b38fa36b-6a11-2c57-e5e6-8e73eba32d63}">
           <p14:sldIdLst>
             <p14:sldId id="257"/>
             <p14:sldId id="258"/>
             <p14:sldId id="259"/>
           </p14:sldIdLst>
         </p14:section>
-        <p14:section name="Comprendre" id="{46b9be43-0399-4f6c-f550-b2f2939e8e04}">
+        <p14:section name="Comprendre" id="{b5502946-a2ac-cbec-c525-966aba6a38f1}">
           <p14:sldIdLst>
             <p14:sldId id="260"/>
             <p14:sldId id="261"/>
@@ -158,7 +158,7 @@
             <p14:sldId id="269"/>
           </p14:sldIdLst>
         </p14:section>
-        <p14:section name="JIJ NU ! — Oefeningen" id="{a7b0e052-5a7b-750e-5fb6-7075ee05c1dc}">
+        <p14:section name="JIJ NU ! — Oefeningen" id="{54fb41cd-79f4-95bf-25dd-a2979427cf85}">
           <p14:sldIdLst>
             <p14:sldId id="270"/>
             <p14:sldId id="271"/>
@@ -173,7 +173,7 @@
             <p14:sldId id="280"/>
           </p14:sldIdLst>
         </p14:section>
-        <p14:section name="Clôture" id="{f62464a5-e234-b8a7-a9fb-aaa8f6ea75af}">
+        <p14:section name="Clôture" id="{3cfbde0d-d976-5dbe-cdfc-99a2d5f9191b}">
           <p14:sldIdLst>
             <p14:sldId id="281"/>
           </p14:sldIdLst>
@@ -3713,7 +3713,7 @@
                   <a:srgbClr val="FFFFFF"/>
                 </a:solidFill>
               </a:rPr>
-              <a:t>MODULE 7 / 10</a:t>
+              <a:t>MODULE 7 / 15</a:t>
             </a:r>
             <a:endParaRPr lang="en-US" sz="1400" dirty="0"/>
           </a:p>

--- a/neerlandais1/powerpoints/Module_7_Landen_en_talen.pptx
+++ b/neerlandais1/powerpoints/Module_7_Landen_en_talen.pptx
@@ -132,19 +132,19 @@
   <p:extLst>
     <p:ext uri="{521415D9-36F7-43E2-AB2F-B90AF26B5E84}">
       <p14:sectionLst xmlns:p14="http://schemas.microsoft.com/office/powerpoint/2010/main">
-        <p14:section name="Ouverture" id="{fd0694a7-01c6-c918-9d8e-5f7bd01a6401}">
+        <p14:section name="Ouverture" id="{0c9d7b2d-bb21-3d2a-8831-99199f5c3cb6}">
           <p14:sldIdLst>
             <p14:sldId id="256"/>
           </p14:sldIdLst>
         </p14:section>
-        <p14:section name="Découvrir" id="{b38fa36b-6a11-2c57-e5e6-8e73eba32d63}">
+        <p14:section name="Découvrir" id="{7d55276e-f1e4-7efa-efd3-2a0e6d8aa35e}">
           <p14:sldIdLst>
             <p14:sldId id="257"/>
             <p14:sldId id="258"/>
             <p14:sldId id="259"/>
           </p14:sldIdLst>
         </p14:section>
-        <p14:section name="Comprendre" id="{b5502946-a2ac-cbec-c525-966aba6a38f1}">
+        <p14:section name="Comprendre" id="{41207c7e-47c5-ff54-7a03-90037302fde0}">
           <p14:sldIdLst>
             <p14:sldId id="260"/>
             <p14:sldId id="261"/>
@@ -158,7 +158,7 @@
             <p14:sldId id="269"/>
           </p14:sldIdLst>
         </p14:section>
-        <p14:section name="JIJ NU ! — Oefeningen" id="{54fb41cd-79f4-95bf-25dd-a2979427cf85}">
+        <p14:section name="JIJ NU ! — Oefeningen" id="{a1ca1134-c877-3abb-2ab8-742c65ed013a}">
           <p14:sldIdLst>
             <p14:sldId id="270"/>
             <p14:sldId id="271"/>
@@ -173,7 +173,7 @@
             <p14:sldId id="280"/>
           </p14:sldIdLst>
         </p14:section>
-        <p14:section name="Clôture" id="{3cfbde0d-d976-5dbe-cdfc-99a2d5f9191b}">
+        <p14:section name="Clôture" id="{14c9003c-50e2-c514-bd43-f9b2d35e721c}">
           <p14:sldIdLst>
             <p14:sldId id="281"/>
           </p14:sldIdLst>
@@ -3713,7 +3713,7 @@
                   <a:srgbClr val="FFFFFF"/>
                 </a:solidFill>
               </a:rPr>
-              <a:t>MODULE 7 / 15</a:t>
+              <a:t>MODULE 7 / 19</a:t>
             </a:r>
             <a:endParaRPr lang="en-US" sz="1400" dirty="0"/>
           </a:p>

--- a/neerlandais1/powerpoints/Module_7_Landen_en_talen.pptx
+++ b/neerlandais1/powerpoints/Module_7_Landen_en_talen.pptx
@@ -132,19 +132,19 @@
   <p:extLst>
     <p:ext uri="{521415D9-36F7-43E2-AB2F-B90AF26B5E84}">
       <p14:sectionLst xmlns:p14="http://schemas.microsoft.com/office/powerpoint/2010/main">
-        <p14:section name="Ouverture" id="{0c9d7b2d-bb21-3d2a-8831-99199f5c3cb6}">
+        <p14:section name="Ouverture" id="{eac5ec9b-6ec0-bbc8-0976-48940ffb6a89}">
           <p14:sldIdLst>
             <p14:sldId id="256"/>
           </p14:sldIdLst>
         </p14:section>
-        <p14:section name="Découvrir" id="{7d55276e-f1e4-7efa-efd3-2a0e6d8aa35e}">
+        <p14:section name="Découvrir" id="{16927928-04a7-6a2a-86dc-77990a4b5675}">
           <p14:sldIdLst>
             <p14:sldId id="257"/>
             <p14:sldId id="258"/>
             <p14:sldId id="259"/>
           </p14:sldIdLst>
         </p14:section>
-        <p14:section name="Comprendre" id="{41207c7e-47c5-ff54-7a03-90037302fde0}">
+        <p14:section name="Comprendre" id="{775d961a-6196-07d5-afbb-7f1461992c55}">
           <p14:sldIdLst>
             <p14:sldId id="260"/>
             <p14:sldId id="261"/>
@@ -158,7 +158,7 @@
             <p14:sldId id="269"/>
           </p14:sldIdLst>
         </p14:section>
-        <p14:section name="JIJ NU ! — Oefeningen" id="{a1ca1134-c877-3abb-2ab8-742c65ed013a}">
+        <p14:section name="JIJ NU ! — Oefeningen" id="{349d4229-a926-b323-c484-baa3a973f68f}">
           <p14:sldIdLst>
             <p14:sldId id="270"/>
             <p14:sldId id="271"/>
@@ -173,7 +173,7 @@
             <p14:sldId id="280"/>
           </p14:sldIdLst>
         </p14:section>
-        <p14:section name="Clôture" id="{14c9003c-50e2-c514-bd43-f9b2d35e721c}">
+        <p14:section name="Clôture" id="{cbc0fb94-4691-3e35-21c0-090674f36025}">
           <p14:sldIdLst>
             <p14:sldId id="281"/>
           </p14:sldIdLst>
@@ -3713,7 +3713,7 @@
                   <a:srgbClr val="FFFFFF"/>
                 </a:solidFill>
               </a:rPr>
-              <a:t>MODULE 7 / 19</a:t>
+              <a:t>MODULE 7 / 24</a:t>
             </a:r>
             <a:endParaRPr lang="en-US" sz="1400" dirty="0"/>
           </a:p>

--- a/neerlandais1/powerpoints/Module_7_Landen_en_talen.pptx
+++ b/neerlandais1/powerpoints/Module_7_Landen_en_talen.pptx
@@ -132,19 +132,19 @@
   <p:extLst>
     <p:ext uri="{521415D9-36F7-43E2-AB2F-B90AF26B5E84}">
       <p14:sectionLst xmlns:p14="http://schemas.microsoft.com/office/powerpoint/2010/main">
-        <p14:section name="Ouverture" id="{eac5ec9b-6ec0-bbc8-0976-48940ffb6a89}">
+        <p14:section name="Ouverture" id="{b7f2b7d9-8c51-06b4-cd20-724162101117}">
           <p14:sldIdLst>
             <p14:sldId id="256"/>
           </p14:sldIdLst>
         </p14:section>
-        <p14:section name="Découvrir" id="{16927928-04a7-6a2a-86dc-77990a4b5675}">
+        <p14:section name="Découvrir" id="{68d4f23b-e2bc-aead-b8af-c3c5549e41ea}">
           <p14:sldIdLst>
             <p14:sldId id="257"/>
             <p14:sldId id="258"/>
             <p14:sldId id="259"/>
           </p14:sldIdLst>
         </p14:section>
-        <p14:section name="Comprendre" id="{775d961a-6196-07d5-afbb-7f1461992c55}">
+        <p14:section name="Comprendre" id="{b2986664-9700-4c50-055c-a84f59649c36}">
           <p14:sldIdLst>
             <p14:sldId id="260"/>
             <p14:sldId id="261"/>
@@ -158,7 +158,7 @@
             <p14:sldId id="269"/>
           </p14:sldIdLst>
         </p14:section>
-        <p14:section name="JIJ NU ! — Oefeningen" id="{349d4229-a926-b323-c484-baa3a973f68f}">
+        <p14:section name="JIJ NU ! — Oefeningen" id="{8bb2d232-76aa-0c08-389f-08da221f33e5}">
           <p14:sldIdLst>
             <p14:sldId id="270"/>
             <p14:sldId id="271"/>
@@ -173,7 +173,7 @@
             <p14:sldId id="280"/>
           </p14:sldIdLst>
         </p14:section>
-        <p14:section name="Clôture" id="{cbc0fb94-4691-3e35-21c0-090674f36025}">
+        <p14:section name="Clôture" id="{fd89b8b3-c6df-c857-6bed-827e60d6d52b}">
           <p14:sldIdLst>
             <p14:sldId id="281"/>
           </p14:sldIdLst>
@@ -3713,7 +3713,7 @@
                   <a:srgbClr val="FFFFFF"/>
                 </a:solidFill>
               </a:rPr>
-              <a:t>MODULE 7 / 24</a:t>
+              <a:t>MODULE 7 / 29</a:t>
             </a:r>
             <a:endParaRPr lang="en-US" sz="1400" dirty="0"/>
           </a:p>

--- a/neerlandais1/powerpoints/Module_7_Landen_en_talen.pptx
+++ b/neerlandais1/powerpoints/Module_7_Landen_en_talen.pptx
@@ -132,19 +132,19 @@
   <p:extLst>
     <p:ext uri="{521415D9-36F7-43E2-AB2F-B90AF26B5E84}">
       <p14:sectionLst xmlns:p14="http://schemas.microsoft.com/office/powerpoint/2010/main">
-        <p14:section name="Ouverture" id="{b7f2b7d9-8c51-06b4-cd20-724162101117}">
+        <p14:section name="Ouverture" id="{fbfc9f9d-a6b6-ce00-fac5-68812cab8a99}">
           <p14:sldIdLst>
             <p14:sldId id="256"/>
           </p14:sldIdLst>
         </p14:section>
-        <p14:section name="Découvrir" id="{68d4f23b-e2bc-aead-b8af-c3c5549e41ea}">
+        <p14:section name="Découvrir" id="{c61f0927-4e7b-f4cc-c339-a52cfc5acde8}">
           <p14:sldIdLst>
             <p14:sldId id="257"/>
             <p14:sldId id="258"/>
             <p14:sldId id="259"/>
           </p14:sldIdLst>
         </p14:section>
-        <p14:section name="Comprendre" id="{b2986664-9700-4c50-055c-a84f59649c36}">
+        <p14:section name="Comprendre" id="{7f91acc2-c51b-292d-2f9e-6d7b68fd846d}">
           <p14:sldIdLst>
             <p14:sldId id="260"/>
             <p14:sldId id="261"/>
@@ -158,7 +158,7 @@
             <p14:sldId id="269"/>
           </p14:sldIdLst>
         </p14:section>
-        <p14:section name="JIJ NU ! — Oefeningen" id="{8bb2d232-76aa-0c08-389f-08da221f33e5}">
+        <p14:section name="JIJ NU ! — Oefeningen" id="{6923088e-0556-3b52-3349-a1c9dd49e80f}">
           <p14:sldIdLst>
             <p14:sldId id="270"/>
             <p14:sldId id="271"/>
@@ -173,7 +173,7 @@
             <p14:sldId id="280"/>
           </p14:sldIdLst>
         </p14:section>
-        <p14:section name="Clôture" id="{fd89b8b3-c6df-c857-6bed-827e60d6d52b}">
+        <p14:section name="Clôture" id="{3d0c67d7-bca4-47a1-3e73-6c91b6d82ced}">
           <p14:sldIdLst>
             <p14:sldId id="281"/>
           </p14:sldIdLst>
@@ -3713,7 +3713,7 @@
                   <a:srgbClr val="FFFFFF"/>
                 </a:solidFill>
               </a:rPr>
-              <a:t>MODULE 7 / 29</a:t>
+              <a:t>MODULE 7 / 32</a:t>
             </a:r>
             <a:endParaRPr lang="en-US" sz="1400" dirty="0"/>
           </a:p>

--- a/neerlandais1/powerpoints/Module_7_Landen_en_talen.pptx
+++ b/neerlandais1/powerpoints/Module_7_Landen_en_talen.pptx
@@ -132,19 +132,19 @@
   <p:extLst>
     <p:ext uri="{521415D9-36F7-43E2-AB2F-B90AF26B5E84}">
       <p14:sectionLst xmlns:p14="http://schemas.microsoft.com/office/powerpoint/2010/main">
-        <p14:section name="Ouverture" id="{fbfc9f9d-a6b6-ce00-fac5-68812cab8a99}">
+        <p14:section name="Ouverture" id="{9ace8001-c996-6521-a420-0415e6ddc27d}">
           <p14:sldIdLst>
             <p14:sldId id="256"/>
           </p14:sldIdLst>
         </p14:section>
-        <p14:section name="Découvrir" id="{c61f0927-4e7b-f4cc-c339-a52cfc5acde8}">
+        <p14:section name="Découvrir" id="{aea223fc-8d3e-680e-321e-88ca95108ab7}">
           <p14:sldIdLst>
             <p14:sldId id="257"/>
             <p14:sldId id="258"/>
             <p14:sldId id="259"/>
           </p14:sldIdLst>
         </p14:section>
-        <p14:section name="Comprendre" id="{7f91acc2-c51b-292d-2f9e-6d7b68fd846d}">
+        <p14:section name="Comprendre" id="{e5f8f11b-0155-fed3-ec14-07d266af1399}">
           <p14:sldIdLst>
             <p14:sldId id="260"/>
             <p14:sldId id="261"/>
@@ -158,7 +158,7 @@
             <p14:sldId id="269"/>
           </p14:sldIdLst>
         </p14:section>
-        <p14:section name="JIJ NU ! — Oefeningen" id="{6923088e-0556-3b52-3349-a1c9dd49e80f}">
+        <p14:section name="JIJ NU ! — Oefeningen" id="{d3fe84e5-e90f-cb90-72e8-e9fc1f30812f}">
           <p14:sldIdLst>
             <p14:sldId id="270"/>
             <p14:sldId id="271"/>
@@ -173,7 +173,7 @@
             <p14:sldId id="280"/>
           </p14:sldIdLst>
         </p14:section>
-        <p14:section name="Clôture" id="{3d0c67d7-bca4-47a1-3e73-6c91b6d82ced}">
+        <p14:section name="Clôture" id="{a62bbf77-7610-065b-e3a7-a4144c914dbf}">
           <p14:sldIdLst>
             <p14:sldId id="281"/>
           </p14:sldIdLst>

--- a/neerlandais1/powerpoints/Module_7_Landen_en_talen.pptx
+++ b/neerlandais1/powerpoints/Module_7_Landen_en_talen.pptx
@@ -132,19 +132,19 @@
   <p:extLst>
     <p:ext uri="{521415D9-36F7-43E2-AB2F-B90AF26B5E84}">
       <p14:sectionLst xmlns:p14="http://schemas.microsoft.com/office/powerpoint/2010/main">
-        <p14:section name="Ouverture" id="{9ace8001-c996-6521-a420-0415e6ddc27d}">
+        <p14:section name="Ouverture" id="{a9651540-0653-c1a5-f875-ce523fd37722}">
           <p14:sldIdLst>
             <p14:sldId id="256"/>
           </p14:sldIdLst>
         </p14:section>
-        <p14:section name="Découvrir" id="{aea223fc-8d3e-680e-321e-88ca95108ab7}">
+        <p14:section name="Découvrir" id="{b05cec25-25d2-f2df-4b10-4214d7357dc1}">
           <p14:sldIdLst>
             <p14:sldId id="257"/>
             <p14:sldId id="258"/>
             <p14:sldId id="259"/>
           </p14:sldIdLst>
         </p14:section>
-        <p14:section name="Comprendre" id="{e5f8f11b-0155-fed3-ec14-07d266af1399}">
+        <p14:section name="Comprendre" id="{bd485374-8a36-d787-d1ac-6e5c40bd47be}">
           <p14:sldIdLst>
             <p14:sldId id="260"/>
             <p14:sldId id="261"/>
@@ -158,7 +158,7 @@
             <p14:sldId id="269"/>
           </p14:sldIdLst>
         </p14:section>
-        <p14:section name="JIJ NU ! — Oefeningen" id="{d3fe84e5-e90f-cb90-72e8-e9fc1f30812f}">
+        <p14:section name="JIJ NU ! — Oefeningen" id="{44d5812c-1e12-8481-8a3c-17ae2aece9a5}">
           <p14:sldIdLst>
             <p14:sldId id="270"/>
             <p14:sldId id="271"/>
@@ -173,7 +173,7 @@
             <p14:sldId id="280"/>
           </p14:sldIdLst>
         </p14:section>
-        <p14:section name="Clôture" id="{a62bbf77-7610-065b-e3a7-a4144c914dbf}">
+        <p14:section name="Clôture" id="{01e52e35-d987-a795-dd5d-727ea23fe1b0}">
           <p14:sldIdLst>
             <p14:sldId id="281"/>
           </p14:sldIdLst>

--- a/neerlandais1/powerpoints/Module_7_Landen_en_talen.pptx
+++ b/neerlandais1/powerpoints/Module_7_Landen_en_talen.pptx
@@ -132,19 +132,19 @@
   <p:extLst>
     <p:ext uri="{521415D9-36F7-43E2-AB2F-B90AF26B5E84}">
       <p14:sectionLst xmlns:p14="http://schemas.microsoft.com/office/powerpoint/2010/main">
-        <p14:section name="Ouverture" id="{a9651540-0653-c1a5-f875-ce523fd37722}">
+        <p14:section name="Ouverture" id="{8a57bcc0-175e-d3e0-c4de-fe06306c7d5d}">
           <p14:sldIdLst>
             <p14:sldId id="256"/>
           </p14:sldIdLst>
         </p14:section>
-        <p14:section name="Découvrir" id="{b05cec25-25d2-f2df-4b10-4214d7357dc1}">
+        <p14:section name="Découvrir" id="{a2239b18-8bd0-72d7-00a3-6f01fbd6db6a}">
           <p14:sldIdLst>
             <p14:sldId id="257"/>
             <p14:sldId id="258"/>
             <p14:sldId id="259"/>
           </p14:sldIdLst>
         </p14:section>
-        <p14:section name="Comprendre" id="{bd485374-8a36-d787-d1ac-6e5c40bd47be}">
+        <p14:section name="Comprendre" id="{f44a2919-8671-ed3e-20db-c2d2c48be4db}">
           <p14:sldIdLst>
             <p14:sldId id="260"/>
             <p14:sldId id="261"/>
@@ -158,7 +158,7 @@
             <p14:sldId id="269"/>
           </p14:sldIdLst>
         </p14:section>
-        <p14:section name="JIJ NU ! — Oefeningen" id="{44d5812c-1e12-8481-8a3c-17ae2aece9a5}">
+        <p14:section name="JIJ NU ! — Oefeningen" id="{7581e7b6-74cb-a3f7-3796-0da1e381f4c5}">
           <p14:sldIdLst>
             <p14:sldId id="270"/>
             <p14:sldId id="271"/>
@@ -173,7 +173,7 @@
             <p14:sldId id="280"/>
           </p14:sldIdLst>
         </p14:section>
-        <p14:section name="Clôture" id="{01e52e35-d987-a795-dd5d-727ea23fe1b0}">
+        <p14:section name="Clôture" id="{1b0b1167-1220-88f7-7210-5315cbbec7bd}">
           <p14:sldIdLst>
             <p14:sldId id="281"/>
           </p14:sldIdLst>

--- a/neerlandais1/powerpoints/Module_7_Landen_en_talen.pptx
+++ b/neerlandais1/powerpoints/Module_7_Landen_en_talen.pptx
@@ -132,19 +132,19 @@
   <p:extLst>
     <p:ext uri="{521415D9-36F7-43E2-AB2F-B90AF26B5E84}">
       <p14:sectionLst xmlns:p14="http://schemas.microsoft.com/office/powerpoint/2010/main">
-        <p14:section name="Ouverture" id="{8a57bcc0-175e-d3e0-c4de-fe06306c7d5d}">
+        <p14:section name="Ouverture" id="{bd5c68ad-bb96-d761-7218-fa06b3addef6}">
           <p14:sldIdLst>
             <p14:sldId id="256"/>
           </p14:sldIdLst>
         </p14:section>
-        <p14:section name="Découvrir" id="{a2239b18-8bd0-72d7-00a3-6f01fbd6db6a}">
+        <p14:section name="Découvrir" id="{38d29f59-52dd-6614-1001-c0d70cf42b1a}">
           <p14:sldIdLst>
             <p14:sldId id="257"/>
             <p14:sldId id="258"/>
             <p14:sldId id="259"/>
           </p14:sldIdLst>
         </p14:section>
-        <p14:section name="Comprendre" id="{f44a2919-8671-ed3e-20db-c2d2c48be4db}">
+        <p14:section name="Comprendre" id="{69647757-6bca-b301-216a-9d170c254b4c}">
           <p14:sldIdLst>
             <p14:sldId id="260"/>
             <p14:sldId id="261"/>
@@ -158,7 +158,7 @@
             <p14:sldId id="269"/>
           </p14:sldIdLst>
         </p14:section>
-        <p14:section name="JIJ NU ! — Oefeningen" id="{7581e7b6-74cb-a3f7-3796-0da1e381f4c5}">
+        <p14:section name="JIJ NU ! — Oefeningen" id="{61d9ee01-9290-f56f-bbc7-d636fa065665}">
           <p14:sldIdLst>
             <p14:sldId id="270"/>
             <p14:sldId id="271"/>
@@ -173,7 +173,7 @@
             <p14:sldId id="280"/>
           </p14:sldIdLst>
         </p14:section>
-        <p14:section name="Clôture" id="{1b0b1167-1220-88f7-7210-5315cbbec7bd}">
+        <p14:section name="Clôture" id="{d73b3969-4f5b-bf5c-4e58-7d394c07fb73}">
           <p14:sldIdLst>
             <p14:sldId id="281"/>
           </p14:sldIdLst>

--- a/neerlandais1/powerpoints/Module_7_Landen_en_talen.pptx
+++ b/neerlandais1/powerpoints/Module_7_Landen_en_talen.pptx
@@ -132,19 +132,19 @@
   <p:extLst>
     <p:ext uri="{521415D9-36F7-43E2-AB2F-B90AF26B5E84}">
       <p14:sectionLst xmlns:p14="http://schemas.microsoft.com/office/powerpoint/2010/main">
-        <p14:section name="Ouverture" id="{bd5c68ad-bb96-d761-7218-fa06b3addef6}">
+        <p14:section name="Ouverture" id="{0c9f0009-e428-54f8-9ce6-088a83fc37df}">
           <p14:sldIdLst>
             <p14:sldId id="256"/>
           </p14:sldIdLst>
         </p14:section>
-        <p14:section name="Découvrir" id="{38d29f59-52dd-6614-1001-c0d70cf42b1a}">
+        <p14:section name="Découvrir" id="{e88df502-3bf7-724e-138e-8d30612ae979}">
           <p14:sldIdLst>
             <p14:sldId id="257"/>
             <p14:sldId id="258"/>
             <p14:sldId id="259"/>
           </p14:sldIdLst>
         </p14:section>
-        <p14:section name="Comprendre" id="{69647757-6bca-b301-216a-9d170c254b4c}">
+        <p14:section name="Comprendre" id="{49c6a0e9-97e6-eb8b-90ea-be34c568ca0b}">
           <p14:sldIdLst>
             <p14:sldId id="260"/>
             <p14:sldId id="261"/>
@@ -158,7 +158,7 @@
             <p14:sldId id="269"/>
           </p14:sldIdLst>
         </p14:section>
-        <p14:section name="JIJ NU ! — Oefeningen" id="{61d9ee01-9290-f56f-bbc7-d636fa065665}">
+        <p14:section name="JIJ NU ! — Oefeningen" id="{1ce3500b-f42d-204c-758f-a01708a6a747}">
           <p14:sldIdLst>
             <p14:sldId id="270"/>
             <p14:sldId id="271"/>
@@ -173,7 +173,7 @@
             <p14:sldId id="280"/>
           </p14:sldIdLst>
         </p14:section>
-        <p14:section name="Clôture" id="{d73b3969-4f5b-bf5c-4e58-7d394c07fb73}">
+        <p14:section name="Clôture" id="{7f755588-da39-75e3-1aef-dc4ad9e221bd}">
           <p14:sldIdLst>
             <p14:sldId id="281"/>
           </p14:sldIdLst>

--- a/neerlandais1/powerpoints/Module_7_Landen_en_talen.pptx
+++ b/neerlandais1/powerpoints/Module_7_Landen_en_talen.pptx
@@ -132,19 +132,19 @@
   <p:extLst>
     <p:ext uri="{521415D9-36F7-43E2-AB2F-B90AF26B5E84}">
       <p14:sectionLst xmlns:p14="http://schemas.microsoft.com/office/powerpoint/2010/main">
-        <p14:section name="Ouverture" id="{0c9f0009-e428-54f8-9ce6-088a83fc37df}">
+        <p14:section name="Ouverture" id="{040601df-1946-5a44-8c67-ce503446a5ef}">
           <p14:sldIdLst>
             <p14:sldId id="256"/>
           </p14:sldIdLst>
         </p14:section>
-        <p14:section name="Découvrir" id="{e88df502-3bf7-724e-138e-8d30612ae979}">
+        <p14:section name="Découvrir" id="{2f29d843-ece8-7069-aa73-f59a627bab05}">
           <p14:sldIdLst>
             <p14:sldId id="257"/>
             <p14:sldId id="258"/>
             <p14:sldId id="259"/>
           </p14:sldIdLst>
         </p14:section>
-        <p14:section name="Comprendre" id="{49c6a0e9-97e6-eb8b-90ea-be34c568ca0b}">
+        <p14:section name="Comprendre" id="{1e4193ba-a23e-45bb-3b5f-61814cfd3f65}">
           <p14:sldIdLst>
             <p14:sldId id="260"/>
             <p14:sldId id="261"/>
@@ -158,7 +158,7 @@
             <p14:sldId id="269"/>
           </p14:sldIdLst>
         </p14:section>
-        <p14:section name="JIJ NU ! — Oefeningen" id="{1ce3500b-f42d-204c-758f-a01708a6a747}">
+        <p14:section name="JIJ NU ! — Oefeningen" id="{f17ff8b9-0a50-1afc-284e-e33417d2a8ce}">
           <p14:sldIdLst>
             <p14:sldId id="270"/>
             <p14:sldId id="271"/>
@@ -173,7 +173,7 @@
             <p14:sldId id="280"/>
           </p14:sldIdLst>
         </p14:section>
-        <p14:section name="Clôture" id="{7f755588-da39-75e3-1aef-dc4ad9e221bd}">
+        <p14:section name="Clôture" id="{5236f8ce-6de1-b692-533c-494906e4a6c4}">
           <p14:sldIdLst>
             <p14:sldId id="281"/>
           </p14:sldIdLst>

--- a/neerlandais1/powerpoints/Module_7_Landen_en_talen.pptx
+++ b/neerlandais1/powerpoints/Module_7_Landen_en_talen.pptx
@@ -132,19 +132,19 @@
   <p:extLst>
     <p:ext uri="{521415D9-36F7-43E2-AB2F-B90AF26B5E84}">
       <p14:sectionLst xmlns:p14="http://schemas.microsoft.com/office/powerpoint/2010/main">
-        <p14:section name="Ouverture" id="{040601df-1946-5a44-8c67-ce503446a5ef}">
+        <p14:section name="Ouverture" id="{ce1b6e51-f2e6-7aa2-7970-4651439352ae}">
           <p14:sldIdLst>
             <p14:sldId id="256"/>
           </p14:sldIdLst>
         </p14:section>
-        <p14:section name="Découvrir" id="{2f29d843-ece8-7069-aa73-f59a627bab05}">
+        <p14:section name="Découvrir" id="{ddefa278-d49a-9efb-9f5c-2251d388d3a4}">
           <p14:sldIdLst>
             <p14:sldId id="257"/>
             <p14:sldId id="258"/>
             <p14:sldId id="259"/>
           </p14:sldIdLst>
         </p14:section>
-        <p14:section name="Comprendre" id="{1e4193ba-a23e-45bb-3b5f-61814cfd3f65}">
+        <p14:section name="Comprendre" id="{815b5c06-69da-f11d-2d17-50ae6c288950}">
           <p14:sldIdLst>
             <p14:sldId id="260"/>
             <p14:sldId id="261"/>
@@ -158,7 +158,7 @@
             <p14:sldId id="269"/>
           </p14:sldIdLst>
         </p14:section>
-        <p14:section name="JIJ NU ! — Oefeningen" id="{f17ff8b9-0a50-1afc-284e-e33417d2a8ce}">
+        <p14:section name="JIJ NU ! — Oefeningen" id="{5b3b4ab9-9f0f-0d6f-a34c-2a04409d32bc}">
           <p14:sldIdLst>
             <p14:sldId id="270"/>
             <p14:sldId id="271"/>
@@ -173,7 +173,7 @@
             <p14:sldId id="280"/>
           </p14:sldIdLst>
         </p14:section>
-        <p14:section name="Clôture" id="{5236f8ce-6de1-b692-533c-494906e4a6c4}">
+        <p14:section name="Clôture" id="{eebbaf93-e29d-3bb8-6636-92dcfbf09a77}">
           <p14:sldIdLst>
             <p14:sldId id="281"/>
           </p14:sldIdLst>

--- a/neerlandais1/powerpoints/Module_7_Landen_en_talen.pptx
+++ b/neerlandais1/powerpoints/Module_7_Landen_en_talen.pptx
@@ -132,19 +132,19 @@
   <p:extLst>
     <p:ext uri="{521415D9-36F7-43E2-AB2F-B90AF26B5E84}">
       <p14:sectionLst xmlns:p14="http://schemas.microsoft.com/office/powerpoint/2010/main">
-        <p14:section name="Ouverture" id="{ce1b6e51-f2e6-7aa2-7970-4651439352ae}">
+        <p14:section name="Ouverture" id="{b188fc29-f549-5e51-e542-2eeebab6e81c}">
           <p14:sldIdLst>
             <p14:sldId id="256"/>
           </p14:sldIdLst>
         </p14:section>
-        <p14:section name="Découvrir" id="{ddefa278-d49a-9efb-9f5c-2251d388d3a4}">
+        <p14:section name="Découvrir" id="{0f55cfab-8d02-3f33-b52c-5d8431275669}">
           <p14:sldIdLst>
             <p14:sldId id="257"/>
             <p14:sldId id="258"/>
             <p14:sldId id="259"/>
           </p14:sldIdLst>
         </p14:section>
-        <p14:section name="Comprendre" id="{815b5c06-69da-f11d-2d17-50ae6c288950}">
+        <p14:section name="Comprendre" id="{6e88c6eb-c9c3-afa6-155f-809199893a13}">
           <p14:sldIdLst>
             <p14:sldId id="260"/>
             <p14:sldId id="261"/>
@@ -158,7 +158,7 @@
             <p14:sldId id="269"/>
           </p14:sldIdLst>
         </p14:section>
-        <p14:section name="JIJ NU ! — Oefeningen" id="{5b3b4ab9-9f0f-0d6f-a34c-2a04409d32bc}">
+        <p14:section name="JIJ NU ! — Oefeningen" id="{7d5b25b3-1781-e539-c85f-6e9490ef01bd}">
           <p14:sldIdLst>
             <p14:sldId id="270"/>
             <p14:sldId id="271"/>
@@ -173,7 +173,7 @@
             <p14:sldId id="280"/>
           </p14:sldIdLst>
         </p14:section>
-        <p14:section name="Clôture" id="{eebbaf93-e29d-3bb8-6636-92dcfbf09a77}">
+        <p14:section name="Clôture" id="{32e7f6db-7fdf-b02f-4e57-61dfbacf635a}">
           <p14:sldIdLst>
             <p14:sldId id="281"/>
           </p14:sldIdLst>
